--- a/practice-03/deliverables/presentation/practice-03-presentation-es.pptx
+++ b/practice-03/deliverables/presentation/practice-03-presentation-es.pptx
@@ -5089,8 +5089,8 @@
         </p:nvSpPr>
         <p:spPr>
           <a:xfrm>
-            <a:off x="594360" y="5623560"/>
-            <a:ext cx="10972800" cy="594360"/>
+            <a:off x="594360" y="5504688"/>
+            <a:ext cx="10972800" cy="804672"/>
           </a:xfrm>
           <a:prstGeom prst="roundRect">
             <a:avLst/>
@@ -5134,7 +5134,7 @@
         </p:nvSpPr>
         <p:spPr>
           <a:xfrm>
-            <a:off x="795528" y="5769864"/>
+            <a:off x="795528" y="5650992"/>
             <a:ext cx="10570464" cy="292608"/>
           </a:xfrm>
           <a:prstGeom prst="rect">
@@ -5169,8 +5169,8 @@
         </p:nvSpPr>
         <p:spPr>
           <a:xfrm>
-            <a:off x="868680" y="5797296"/>
-            <a:ext cx="10424160" cy="256032"/>
+            <a:off x="868680" y="5888736"/>
+            <a:ext cx="10424160" cy="310896"/>
           </a:xfrm>
           <a:prstGeom prst="rect">
             <a:avLst/>
@@ -5185,7 +5185,7 @@
           <a:p>
             <a:pPr algn="l"/>
             <a:r>
-              <a:rPr sz="919" b="0">
+              <a:rPr sz="819" b="0">
                 <a:solidFill>
                   <a:srgbClr val="1F2937"/>
                 </a:solidFill>
